--- a/public/blog/presentations/severe-injury-after-a-car-accident-in-birmingham-alabama-2026.pptx
+++ b/public/blog/presentations/severe-injury-after-a-car-accident-in-birmingham-alabama-2026.pptx
@@ -515,7 +515,7 @@
           <a:lstStyle/>
           <a:p>
             <a:r>
-              <a:t>Educational presentation for Severe Injury After a Car Accident in Birmingham, Alabama (2026). Full guide: https://www.wreckmatch.com/blog/severe-injury-after-a-car-accident-in-birmingham-alabama-2026. WreckMatch LLC legal referral service, not a law firm. WreckMatch LLC — legal referral service, not a law firm. Educational only. 800+ participating law firms. Call 855 WRECKMATCH. Reviewed for legal context by Judge Roy Waddell.</a:t>
+              <a:t>Educational presentation for Severe Injury After a Car Accident in Birmingham, Alabama (2026). Full guide: https://www.wreckmatch.com/blog/severe-injury-after-a-car-accident-in-birmingham-alabama-2026. WreckMatch LLC legal referral service, not a law firm. WreckMatch LLC — legal referral service, not a law firm. Educational only. 800+ participating law firms. Call 855 WRECKMATCH. Reviewed for legal context by Hon. Ret. Judge Roy Waddell.</a:t>
             </a:r>
           </a:p>
         </p:txBody>
@@ -607,7 +607,7 @@
           <a:p/>
           <a:p>
             <a:r>
-              <a:t>At a glance: Alabama fast facts: 2-year statute of limitations · Contributory fault rule · 25/50/25 minimum auto liability insurance. WreckMatch LLC — legal referral service, not a law firm. Educational only. 800+ participating law firms. Call 855 WRECKMATCH. Reviewed for legal context by Judge Roy Waddell.</a:t>
+              <a:t>At a glance: Alabama fast facts: 2-year statute of limitations · Contributory fault rule · 25/50/25 minimum auto liability insurance. WreckMatch LLC — legal referral service, not a law firm. Educational only. 800+ participating law firms. Call 855 WRECKMATCH. Reviewed for legal context by Hon. Ret. Judge Roy Waddell.</a:t>
             </a:r>
           </a:p>
         </p:txBody>
@@ -689,7 +689,7 @@
           <a:p/>
           <a:p>
             <a:r>
-              <a:t>Alabama is an at-fault state. The at-fault driver's liability insurance is the primary source of recovery, and you can pursue compensation for medical bills, lost wages, and pain and suffering once liabil WreckMatch LLC — legal referral service, not a law firm. Educational only. 800+ participating law firms. Call 855 WRECKMATCH. Reviewed for legal context by Judge Roy Waddell.</a:t>
+              <a:t>Alabama is an at-fault state. The at-fault driver's liability insurance is the primary source of recovery, and you can pursue compensation for medical bills, lost wages, and pain and suffering once liabil WreckMatch LLC — legal referral service, not a law firm. Educational only. 800+ participating law firms. Call 855 WRECKMATCH. Reviewed for legal context by Hon. Ret. Judge Roy Waddell.</a:t>
             </a:r>
           </a:p>
         </p:txBody>
@@ -759,7 +759,7 @@
           <a:lstStyle/>
           <a:p>
             <a:r>
-              <a:t>Frequently asked questions WreckMatch LLC — legal referral service, not a law firm. Educational only. 800+ participating law firms. Call 855 WRECKMATCH. Reviewed for legal context by Judge Roy Waddell.</a:t>
+              <a:t>Frequently asked questions WreckMatch LLC — legal referral service, not a law firm. Educational only. 800+ participating law firms. Call 855 WRECKMATCH. Reviewed for legal context by Hon. Ret. Judge Roy Waddell.</a:t>
             </a:r>
           </a:p>
         </p:txBody>
@@ -829,7 +829,7 @@
           <a:lstStyle/>
           <a:p>
             <a:r>
-              <a:t>Get matched with a licensed attorney WreckMatch LLC — legal referral service, not a law firm. Educational only. 800+ participating law firms. Call 855 WRECKMATCH. Reviewed for legal context by Judge Roy Waddell.</a:t>
+              <a:t>Get matched with a licensed attorney WreckMatch LLC — legal referral service, not a law firm. Educational only. 800+ participating law firms. Call 855 WRECKMATCH. Reviewed for legal context by Hon. Ret. Judge Roy Waddell.</a:t>
             </a:r>
           </a:p>
         </p:txBody>
@@ -899,7 +899,7 @@
           <a:lstStyle/>
           <a:p>
             <a:r>
-              <a:t>Reviewed for legal context WreckMatch LLC — legal referral service, not a law firm. Educational only. 800+ participating law firms. Call 855 WRECKMATCH. Reviewed for legal context by Judge Roy Waddell.</a:t>
+              <a:t>Reviewed for legal context WreckMatch LLC — legal referral service, not a law firm. Educational only. 800+ participating law firms. Call 855 WRECKMATCH. Reviewed for legal context by Hon. Ret. Judge Roy Waddell.</a:t>
             </a:r>
           </a:p>
         </p:txBody>
@@ -969,7 +969,7 @@
           <a:lstStyle/>
           <a:p>
             <a:r>
-              <a:t>Important — read first WreckMatch LLC — legal referral service, not a law firm. Educational only. 800+ participating law firms. Call 855 WRECKMATCH. Reviewed for legal context by Judge Roy Waddell.</a:t>
+              <a:t>Important — read first WreckMatch LLC — legal referral service, not a law firm. Educational only. 800+ participating law firms. Call 855 WRECKMATCH. Reviewed for legal context by Hon. Ret. Judge Roy Waddell.</a:t>
             </a:r>
           </a:p>
         </p:txBody>
@@ -1039,7 +1039,7 @@
           <a:lstStyle/>
           <a:p>
             <a:r>
-              <a:t>After a crash in Birmingham, Alabama, call 911, get medical care, preserve evidence, avoid recorded insurer statements, and use free attorney matching before signing anything. WreckMatch LLC — legal referral service, not a law firm. Educational only. 800+ participating law firms. Call 855 WRECKMATCH. Reviewed for legal context by Judge Roy Waddell.</a:t>
+              <a:t>After a crash in Birmingham, Alabama, call 911, get medical care, preserve evidence, avoid recorded insurer statements, and use free attorney matching before signing anything. WreckMatch LLC — legal referral service, not a law firm. Educational only. 800+ participating law firms. Call 855 WRECKMATCH. Reviewed for legal context by Hon. Ret. Judge Roy Waddell.</a:t>
             </a:r>
           </a:p>
         </p:txBody>
@@ -1115,7 +1115,7 @@
           <a:p/>
           <a:p>
             <a:r>
-              <a:t>When you are ready, we connect you with licensed counsel in about 60 seconds. WreckMatch is a referral service, not a law firm. WreckMatch LLC — legal referral service, not a law firm. Educational only. 800+ participating law firms. Call 855 WRECKMATCH. Reviewed for legal context by Judge Roy Waddell.</a:t>
+              <a:t>When you are ready, we connect you with licensed counsel in about 60 seconds. WreckMatch is a referral service, not a law firm. WreckMatch LLC — legal referral service, not a law firm. Educational only. 800+ participating law firms. Call 855 WRECKMATCH. Reviewed for legal context by Hon. Ret. Judge Roy Waddell.</a:t>
             </a:r>
           </a:p>
         </p:txBody>
@@ -1210,7 +1210,7 @@
           </a:p>
           <a:p>
             <a:r>
-              <a:t>6. Get matched with a lawyer → WreckMatch LLC — legal referral service, not a law firm. Educational only. 800+ participating law firms. Call 855 WRECKMATCH. Reviewed for legal context by Judge Roy Waddell.</a:t>
+              <a:t>6. Get matched with a lawyer → WreckMatch LLC — legal referral service, not a law firm. Educational only. 800+ participating law firms. Call 855 WRECKMATCH. Reviewed for legal context by Hon. Ret. Judge Roy Waddell.</a:t>
             </a:r>
           </a:p>
         </p:txBody>
@@ -1295,7 +1295,7 @@
           </a:p>
           <a:p>
             <a:r>
-              <a:t>- Wrongful death claims involve different beneficiaries, estates, and deadlines than personal injury alone. WreckMatch LLC — legal referral service, not a law firm. Educational only. 800+ participating law firms. Call 855 WRECKMATCH. Reviewed for legal context by Judge Roy Waddell.</a:t>
+              <a:t>- Wrongful death claims involve different beneficiaries, estates, and deadlines than personal injury alone. WreckMatch LLC — legal referral service, not a law firm. Educational only. 800+ participating law firms. Call 855 WRECKMATCH. Reviewed for legal context by Hon. Ret. Judge Roy Waddell.</a:t>
             </a:r>
           </a:p>
         </p:txBody>
@@ -1391,7 +1391,7 @@
           <a:p/>
           <a:p>
             <a:r>
-              <a:t>Insurers track filing deadlines closely. Missing a notice period can end a claim even when injuries are catastrophic. WreckMatch LLC — legal referral service, not a law firm. Educational only. 800+ participating law firms. Call 855 WRECKMATCH. Reviewed for legal context by Judge Roy Waddell.</a:t>
+              <a:t>Insurers track filing deadlines closely. Missing a notice period can end a claim even when injuries are catastrophic. WreckMatch LLC — legal referral service, not a law firm. Educational only. 800+ participating law firms. Call 855 WRECKMATCH. Reviewed for legal context by Hon. Ret. Judge Roy Waddell.</a:t>
             </a:r>
           </a:p>
         </p:txBody>
@@ -1476,7 +1476,7 @@
           </a:p>
           <a:p>
             <a:r>
-              <a:t>- Multiple policies pointing blame at each other (especially in truck and multi-vehicle crashes) WreckMatch LLC — legal referral service, not a law firm. Educational only. 800+ participating law firms. Call 855 WRECKMATCH. Reviewed for legal context by Judge Roy Waddell.</a:t>
+              <a:t>- Multiple policies pointing blame at each other (especially in truck and multi-vehicle crashes) WreckMatch LLC — legal referral service, not a law firm. Educational only. 800+ participating law firms. Call 855 WRECKMATCH. Reviewed for legal context by Hon. Ret. Judge Roy Waddell.</a:t>
             </a:r>
           </a:p>
         </p:txBody>
@@ -1546,7 +1546,7 @@
           <a:lstStyle/>
           <a:p>
             <a:r>
-              <a:t>Consider a free consultation if: hospitalization occurred, fault is disputed, a commercial truck was involved, a death occurred, or an insurer already denied coverage. WreckMatch connects you with participating licensed attorneys — we do not provide legal advice ourselves. WreckMatch LLC — legal referral service, not a law firm. Educational only. 800+ participating law firms. Call 855 WRECKMATCH. Reviewed for legal context by Judge Roy Waddell.</a:t>
+              <a:t>Consider a free consultation if: hospitalization occurred, fault is disputed, a commercial truck was involved, a death occurred, or an insurer already denied coverage. WreckMatch connects you with participating licensed attorneys — we do not provide legal advice ourselves. WreckMatch LLC — legal referral service, not a law firm. Educational only. 800+ participating law firms. Call 855 WRECKMATCH. Reviewed for legal context by Hon. Ret. Judge Roy Waddell.</a:t>
             </a:r>
           </a:p>
         </p:txBody>
